--- a/docs/UrbanHeat-AlKhor-Pitch.pptx
+++ b/docs/UrbanHeat-AlKhor-Pitch.pptx
@@ -3695,7 +3695,7 @@
                 <a:ea typeface="Bitstream Charter"/>
                 <a:cs typeface="Bitstream Charter"/>
               </a:rPr>
-              <a:t>UrbanHeat</a:t>
+              <a:t>UrbanHeat AI</a:t>
             </a:r>
           </a:p>
         </p:txBody>
@@ -7066,7 +7066,7 @@
                 <a:ea typeface="Bitstream Charter"/>
                 <a:cs typeface="Bitstream Charter"/>
               </a:rPr>
-              <a:t>External land cover: WorldCover for heat screening; Dynamic World in a separate experiment. QA/ranking are rule based. No new model trained.</a:t>
+              <a:t>External AI land cover: WorldCover for heat screening; Dynamic World in a separate experiment. QA/ranking are rule based. No new model trained.</a:t>
             </a:r>
           </a:p>
         </p:txBody>
